--- a/slides/03_평가_오류분석_결론.pptx
+++ b/slides/03_평가_오류분석_결론.pptx
@@ -12,6 +12,7 @@
     <p:sldId id="260" r:id="rId12"/>
     <p:sldId id="261" r:id="rId13"/>
     <p:sldId id="262" r:id="rId14"/>
+    <p:sldId id="263" r:id="rId15"/>
   </p:sldIdLst>
   <p:sldSz cx="12191695" cy="6858000" type="screen4x3"/>
   <p:notesSz cx="6858000" cy="9144000"/>
@@ -1111,7 +1112,7 @@
           <a:lstStyle/>
           <a:p>
             <a:r>
-              <a:t>KoBART 계열 세 개가 베이스라인 전체를 앞섭니다. 여기서 중요한 건, 정확도랑 다양성이 같이 올랐다는 점이에요. 보통 이 둘은 상충합니다. 다양하게 쓰려고 하면 정답에서 멀어지니까요. 그런데 전이학습은 두 축을 같이 끌어올렸습니다. 그리고 오른쪽 아래를 보시면, val_loss가 제일 낮았던 설정이 BLEU 1등이 아니었어요. 세 개 전부 순위가 어긋났습니다. 이게 생성문을 직접 채점하는 단계를 따로 둔 이유입니다.</a:t>
+              <a:t>학습만 하고 끝낸 게 아니라 실제로 돌려봤습니다. 체크포인트 세 개를 그대로 올려서, 질문 하나를 세 모델에 동시에 넣고 답을 비교하는 웹 데모입니다. 화면 보시면 가운데 결함 모델만 빨간색으로 '문장이 안 끝남'이라고 뜹니다. 재미있는 건 잘리는 모양이 질문마다 다르다는 거예요. 청첩장은 같은 말을 반복하다 끊기고, 배고파는 여러 문장을 나열하다 끊기고, 이별 질문은 긴 위로가 이어지다 끊깁니다. 오른쪽 최종 모델은 세 경우 모두 한 문장으로 딱 끝납니다. 참고로 디코딩을 greedy로 바꾸면 왼쪽 베이스라인에서 같은 말을 반복하는 붕괴도 실시간으로 볼 수 있습니다.</a:t>
             </a:r>
           </a:p>
         </p:txBody>
@@ -1137,6 +1138,76 @@
 </file>
 
 <file path=ppt/notesSlides/notesSlide7.xml><?xml version="1.0" encoding="utf-8"?>
+<p:notes xmlns:a="http://schemas.openxmlformats.org/drawingml/2006/main" xmlns:p="http://schemas.openxmlformats.org/presentationml/2006/main" xmlns:r="http://schemas.openxmlformats.org/officeDocument/2006/relationships">
+  <p:cSld>
+    <p:spTree>
+      <p:nvGrpSpPr>
+        <p:cNvPr id="1" name=""/>
+        <p:cNvGrpSpPr/>
+        <p:nvPr/>
+      </p:nvGrpSpPr>
+      <p:grpSpPr>
+        <a:xfrm>
+          <a:off x="0" y="0"/>
+          <a:ext cx="0" cy="0"/>
+          <a:chOff x="0" y="0"/>
+          <a:chExt cx="0" cy="0"/>
+        </a:xfrm>
+      </p:grpSpPr>
+      <p:sp>
+        <p:nvSpPr>
+          <p:cNvPr id="2" name="Slide Image Placeholder 1"/>
+          <p:cNvSpPr>
+            <a:spLocks noGrp="1"/>
+          </p:cNvSpPr>
+          <p:nvPr>
+            <p:ph type="sldImg" idx="2"/>
+          </p:nvPr>
+        </p:nvSpPr>
+        <p:spPr/>
+      </p:sp>
+      <p:sp>
+        <p:nvSpPr>
+          <p:cNvPr id="3" name="Notes Placeholder 2"/>
+          <p:cNvSpPr>
+            <a:spLocks noGrp="1"/>
+          </p:cNvSpPr>
+          <p:nvPr>
+            <p:ph type="body" idx="3" sz="quarter"/>
+          </p:nvPr>
+        </p:nvSpPr>
+        <p:spPr/>
+        <p:txBody>
+          <a:bodyPr/>
+          <a:lstStyle/>
+          <a:p>
+            <a:r>
+              <a:t>KoBART 계열 세 개가 베이스라인 전체를 앞섭니다. 여기서 중요한 건, 정확도랑 다양성이 같이 올랐다는 점이에요. 보통 이 둘은 상충합니다. 다양하게 쓰려고 하면 정답에서 멀어지니까요. 그런데 전이학습은 두 축을 같이 끌어올렸습니다. 그리고 오른쪽 아래를 보시면, val_loss가 제일 낮았던 설정이 BLEU 1등이 아니었어요. 세 개 전부 순위가 어긋났습니다. 이게 생성문을 직접 채점하는 단계를 따로 둔 이유입니다.</a:t>
+            </a:r>
+          </a:p>
+        </p:txBody>
+      </p:sp>
+      <p:sp>
+        <p:nvSpPr>
+          <p:cNvPr id="4" name="Slide Number Placeholder 3"/>
+          <p:cNvSpPr>
+            <a:spLocks noGrp="1"/>
+          </p:cNvSpPr>
+          <p:nvPr>
+            <p:ph type="sldNum" idx="5" sz="quarter"/>
+          </p:nvPr>
+        </p:nvSpPr>
+        <p:spPr/>
+      </p:sp>
+    </p:spTree>
+  </p:cSld>
+  <p:clrMapOvr>
+    <a:masterClrMapping/>
+  </p:clrMapOvr>
+</p:notes>
+</file>
+
+<file path=ppt/notesSlides/notesSlide8.xml><?xml version="1.0" encoding="utf-8"?>
 <p:notes xmlns:a="http://schemas.openxmlformats.org/drawingml/2006/main" xmlns:p="http://schemas.openxmlformats.org/presentationml/2006/main" xmlns:r="http://schemas.openxmlformats.org/officeDocument/2006/relationships">
   <p:cSld>
     <p:spTree>
@@ -8158,6 +8229,328 @@
                 <a:ea typeface="맑은 고딕"/>
                 <a:cs typeface="맑은 고딕"/>
               </a:rPr>
+              <a:t>실제 동작 — 같은 질문, 세 모델</a:t>
+            </a:r>
+          </a:p>
+        </p:txBody>
+      </p:sp>
+      <p:sp>
+        <p:nvSpPr>
+          <p:cNvPr id="3" name="TextBox 2"/>
+          <p:cNvSpPr txBox="1"/>
+          <p:nvPr/>
+        </p:nvSpPr>
+        <p:spPr>
+          <a:xfrm>
+            <a:off x="640080" y="1042415"/>
+            <a:ext cx="10972800" cy="329184"/>
+          </a:xfrm>
+          <a:prstGeom prst="rect">
+            <a:avLst/>
+          </a:prstGeom>
+          <a:noFill/>
+        </p:spPr>
+        <p:txBody>
+          <a:bodyPr wrap="square" lIns="0" rIns="0" tIns="0" bIns="0" anchor="t">
+            <a:spAutoFit/>
+          </a:bodyPr>
+          <a:lstStyle/>
+          <a:p>
+            <a:pPr algn="l"/>
+            <a:r>
+              <a:rPr sz="1350" b="0" i="0">
+                <a:solidFill>
+                  <a:srgbClr val="6E6A6B"/>
+                </a:solidFill>
+                <a:latin typeface="맑은 고딕"/>
+                <a:ea typeface="맑은 고딕"/>
+                <a:cs typeface="맑은 고딕"/>
+              </a:rPr>
+              <a:t>notebooks/09_demo_service.ipynb · 학습한 체크포인트를 그대로 올려 브라우저에서 비교합니다.</a:t>
+            </a:r>
+          </a:p>
+        </p:txBody>
+      </p:sp>
+      <p:pic>
+        <p:nvPicPr>
+          <p:cNvPr id="4" name="Picture 3" descr="demo.gif"/>
+          <p:cNvPicPr>
+            <a:picLocks noChangeAspect="1"/>
+          </p:cNvPicPr>
+          <p:nvPr/>
+        </p:nvPicPr>
+        <p:blipFill>
+          <a:blip r:embed="rId2"/>
+          <a:stretch>
+            <a:fillRect/>
+          </a:stretch>
+        </p:blipFill>
+        <p:spPr>
+          <a:xfrm>
+            <a:off x="640080" y="1572768"/>
+            <a:ext cx="10908792" cy="2927765"/>
+          </a:xfrm>
+          <a:prstGeom prst="rect">
+            <a:avLst/>
+          </a:prstGeom>
+          <a:ln w="9525">
+            <a:solidFill>
+              <a:srgbClr val="DCD6D7"/>
+            </a:solidFill>
+          </a:ln>
+        </p:spPr>
+      </p:pic>
+      <p:sp>
+        <p:nvSpPr>
+          <p:cNvPr id="5" name="Rounded Rectangle 4"/>
+          <p:cNvSpPr/>
+          <p:nvPr/>
+        </p:nvSpPr>
+        <p:spPr>
+          <a:xfrm>
+            <a:off x="640080" y="4709160"/>
+            <a:ext cx="10908792" cy="1600200"/>
+          </a:xfrm>
+          <a:prstGeom prst="roundRect">
+            <a:avLst>
+              <a:gd name="adj" fmla="val 8000"/>
+            </a:avLst>
+          </a:prstGeom>
+          <a:solidFill>
+            <a:srgbClr val="F6E8EA"/>
+          </a:solidFill>
+          <a:ln>
+            <a:noFill/>
+          </a:ln>
+          <a:effectLst/>
+        </p:spPr>
+        <p:style>
+          <a:lnRef idx="1">
+            <a:schemeClr val="accent1"/>
+          </a:lnRef>
+          <a:fillRef idx="3">
+            <a:schemeClr val="accent1"/>
+          </a:fillRef>
+          <a:effectRef idx="2">
+            <a:schemeClr val="accent1"/>
+          </a:effectRef>
+          <a:fontRef idx="minor">
+            <a:schemeClr val="lt1"/>
+          </a:fontRef>
+        </p:style>
+        <p:txBody>
+          <a:bodyPr rtlCol="0" anchor="ctr"/>
+          <a:lstStyle/>
+          <a:p>
+            <a:pPr algn="ctr"/>
+          </a:p>
+        </p:txBody>
+      </p:sp>
+      <p:sp>
+        <p:nvSpPr>
+          <p:cNvPr id="6" name="TextBox 5"/>
+          <p:cNvSpPr txBox="1"/>
+          <p:nvPr/>
+        </p:nvSpPr>
+        <p:spPr>
+          <a:xfrm>
+            <a:off x="896112" y="4864608"/>
+            <a:ext cx="10424160" cy="292608"/>
+          </a:xfrm>
+          <a:prstGeom prst="rect">
+            <a:avLst/>
+          </a:prstGeom>
+          <a:noFill/>
+        </p:spPr>
+        <p:txBody>
+          <a:bodyPr wrap="square" lIns="0" rIns="0" tIns="0" bIns="0" anchor="t">
+            <a:spAutoFit/>
+          </a:bodyPr>
+          <a:lstStyle/>
+          <a:p>
+            <a:pPr algn="l"/>
+            <a:r>
+              <a:rPr sz="1300" b="1" i="0">
+                <a:solidFill>
+                  <a:srgbClr val="990011"/>
+                </a:solidFill>
+                <a:latin typeface="맑은 고딕"/>
+                <a:ea typeface="맑은 고딕"/>
+                <a:cs typeface="맑은 고딕"/>
+              </a:rPr>
+              <a:t>세 질문 모두 가운데(결함)만 문장이 안 끝납니다 — 다만 잘리는 모양은 다릅니다</a:t>
+            </a:r>
+          </a:p>
+        </p:txBody>
+      </p:sp>
+      <p:sp>
+        <p:nvSpPr>
+          <p:cNvPr id="7" name="TextBox 6"/>
+          <p:cNvSpPr txBox="1"/>
+          <p:nvPr/>
+        </p:nvSpPr>
+        <p:spPr>
+          <a:xfrm>
+            <a:off x="896112" y="5230368"/>
+            <a:ext cx="10424160" cy="914400"/>
+          </a:xfrm>
+          <a:prstGeom prst="rect">
+            <a:avLst/>
+          </a:prstGeom>
+          <a:noFill/>
+        </p:spPr>
+        <p:txBody>
+          <a:bodyPr wrap="square" lIns="0" rIns="0" tIns="0" bIns="0" anchor="t">
+            <a:spAutoFit/>
+          </a:bodyPr>
+          <a:lstStyle/>
+          <a:p>
+            <a:pPr algn="l">
+              <a:spcAft>
+                <a:spcPts val="500"/>
+              </a:spcAft>
+            </a:pPr>
+            <a:r>
+              <a:rPr sz="1150" b="1" i="0">
+                <a:solidFill>
+                  <a:srgbClr val="231F20"/>
+                </a:solidFill>
+                <a:latin typeface="맑은 고딕"/>
+                <a:ea typeface="맑은 고딕"/>
+                <a:cs typeface="맑은 고딕"/>
+              </a:rPr>
+              <a:t>청첩장을 찍는 날이 오다니</a:t>
+            </a:r>
+            <a:r>
+              <a:rPr sz="1150" b="0" i="0">
+                <a:solidFill>
+                  <a:srgbClr val="231F20"/>
+                </a:solidFill>
+                <a:latin typeface="맑은 고딕"/>
+                <a:ea typeface="맑은 고딕"/>
+                <a:cs typeface="맑은 고딕"/>
+              </a:rPr>
+              <a:t>  →  같은 말 반복 : "찍는 찍는 재미가 있죠. 찍고 오세요. 찍고"</a:t>
+            </a:r>
+          </a:p>
+          <a:p>
+            <a:pPr algn="l">
+              <a:spcAft>
+                <a:spcPts val="500"/>
+              </a:spcAft>
+            </a:pPr>
+            <a:r>
+              <a:rPr sz="1150" b="1" i="0">
+                <a:solidFill>
+                  <a:srgbClr val="231F20"/>
+                </a:solidFill>
+                <a:latin typeface="맑은 고딕"/>
+                <a:ea typeface="맑은 고딕"/>
+                <a:cs typeface="맑은 고딕"/>
+              </a:rPr>
+              <a:t>배고파</a:t>
+            </a:r>
+            <a:r>
+              <a:rPr sz="1150" b="0" i="0">
+                <a:solidFill>
+                  <a:srgbClr val="231F20"/>
+                </a:solidFill>
+                <a:latin typeface="맑은 고딕"/>
+                <a:ea typeface="맑은 고딕"/>
+                <a:cs typeface="맑은 고딕"/>
+              </a:rPr>
+              <a:t>  →  여러 문장 나열 : "얼른 뭐 좀 드세요! 기운 내세요! 뭐 좀 챙겨"</a:t>
+            </a:r>
+          </a:p>
+          <a:p>
+            <a:pPr algn="l">
+              <a:spcAft>
+                <a:spcPts val="500"/>
+              </a:spcAft>
+            </a:pPr>
+            <a:r>
+              <a:rPr sz="1150" b="1" i="0">
+                <a:solidFill>
+                  <a:srgbClr val="231F20"/>
+                </a:solidFill>
+                <a:latin typeface="맑은 고딕"/>
+                <a:ea typeface="맑은 고딕"/>
+                <a:cs typeface="맑은 고딕"/>
+              </a:rPr>
+              <a:t>여자친구랑 헤어졌어</a:t>
+            </a:r>
+            <a:r>
+              <a:rPr sz="1150" b="0" i="0">
+                <a:solidFill>
+                  <a:srgbClr val="231F20"/>
+                </a:solidFill>
+                <a:latin typeface="맑은 고딕"/>
+                <a:ea typeface="맑은 고딕"/>
+                <a:cs typeface="맑은 고딕"/>
+              </a:rPr>
+              <a:t>  →  긴 위로가 이어지다 : "헤어졌는데 연락하는게 쉽지 않죠. 힘들겠어요. 걱정되"</a:t>
+            </a:r>
+          </a:p>
+        </p:txBody>
+      </p:sp>
+    </p:spTree>
+  </p:cSld>
+  <p:clrMapOvr>
+    <a:masterClrMapping/>
+  </p:clrMapOvr>
+</p:sld>
+</file>
+
+<file path=ppt/slides/slide7.xml><?xml version="1.0" encoding="utf-8"?>
+<p:sld xmlns:a="http://schemas.openxmlformats.org/drawingml/2006/main" xmlns:p="http://schemas.openxmlformats.org/presentationml/2006/main" xmlns:r="http://schemas.openxmlformats.org/officeDocument/2006/relationships">
+  <p:cSld>
+    <p:bg>
+      <p:bgPr>
+        <a:solidFill>
+          <a:srgbClr val="FCF6F5"/>
+        </a:solidFill>
+        <a:effectLst/>
+      </p:bgPr>
+    </p:bg>
+    <p:spTree>
+      <p:nvGrpSpPr>
+        <p:cNvPr id="1" name=""/>
+        <p:cNvGrpSpPr/>
+        <p:nvPr/>
+      </p:nvGrpSpPr>
+      <p:grpSpPr/>
+      <p:sp>
+        <p:nvSpPr>
+          <p:cNvPr id="2" name="TextBox 1"/>
+          <p:cNvSpPr txBox="1"/>
+          <p:nvPr/>
+        </p:nvSpPr>
+        <p:spPr>
+          <a:xfrm>
+            <a:off x="640080" y="411480"/>
+            <a:ext cx="10972800" cy="566928"/>
+          </a:xfrm>
+          <a:prstGeom prst="rect">
+            <a:avLst/>
+          </a:prstGeom>
+          <a:noFill/>
+        </p:spPr>
+        <p:txBody>
+          <a:bodyPr wrap="square" lIns="0" rIns="0" tIns="0" bIns="0" anchor="t">
+            <a:spAutoFit/>
+          </a:bodyPr>
+          <a:lstStyle/>
+          <a:p>
+            <a:pPr algn="l"/>
+            <a:r>
+              <a:rPr sz="3000" b="1" i="0">
+                <a:solidFill>
+                  <a:srgbClr val="231F20"/>
+                </a:solidFill>
+                <a:latin typeface="맑은 고딕"/>
+                <a:ea typeface="맑은 고딕"/>
+                <a:cs typeface="맑은 고딕"/>
+              </a:rPr>
               <a:t>최종 모델 비교 — test 1,175건, 디코딩 고정</a:t>
             </a:r>
           </a:p>
@@ -8782,7 +9175,7 @@
 </p:sld>
 </file>
 
-<file path=ppt/slides/slide7.xml><?xml version="1.0" encoding="utf-8"?>
+<file path=ppt/slides/slide8.xml><?xml version="1.0" encoding="utf-8"?>
 <p:sld xmlns:a="http://schemas.openxmlformats.org/drawingml/2006/main" xmlns:p="http://schemas.openxmlformats.org/presentationml/2006/main" xmlns:r="http://schemas.openxmlformats.org/officeDocument/2006/relationships">
   <p:cSld>
     <p:bg>
